--- a/Novosibirsk_State_University/Курсовая работа/Презентация.pptx
+++ b/Novosibirsk_State_University/Курсовая работа/Презентация.pptx
@@ -269,7 +269,7 @@
           <a:p>
             <a:fld id="{C2A8275D-7213-48BE-B460-22A42A5DBE13}" type="datetimeFigureOut">
               <a:rPr lang="ru-RU" smtClean="0"/>
-              <a:t>27.06.2025</a:t>
+              <a:t>19.12.2025</a:t>
             </a:fld>
             <a:endParaRPr lang="ru-RU"/>
           </a:p>
@@ -467,7 +467,7 @@
           <a:p>
             <a:fld id="{C2A8275D-7213-48BE-B460-22A42A5DBE13}" type="datetimeFigureOut">
               <a:rPr lang="ru-RU" smtClean="0"/>
-              <a:t>27.06.2025</a:t>
+              <a:t>19.12.2025</a:t>
             </a:fld>
             <a:endParaRPr lang="ru-RU"/>
           </a:p>
@@ -675,7 +675,7 @@
           <a:p>
             <a:fld id="{C2A8275D-7213-48BE-B460-22A42A5DBE13}" type="datetimeFigureOut">
               <a:rPr lang="ru-RU" smtClean="0"/>
-              <a:t>27.06.2025</a:t>
+              <a:t>19.12.2025</a:t>
             </a:fld>
             <a:endParaRPr lang="ru-RU"/>
           </a:p>
@@ -873,7 +873,7 @@
           <a:p>
             <a:fld id="{C2A8275D-7213-48BE-B460-22A42A5DBE13}" type="datetimeFigureOut">
               <a:rPr lang="ru-RU" smtClean="0"/>
-              <a:t>27.06.2025</a:t>
+              <a:t>19.12.2025</a:t>
             </a:fld>
             <a:endParaRPr lang="ru-RU"/>
           </a:p>
@@ -1148,7 +1148,7 @@
           <a:p>
             <a:fld id="{C2A8275D-7213-48BE-B460-22A42A5DBE13}" type="datetimeFigureOut">
               <a:rPr lang="ru-RU" smtClean="0"/>
-              <a:t>27.06.2025</a:t>
+              <a:t>19.12.2025</a:t>
             </a:fld>
             <a:endParaRPr lang="ru-RU"/>
           </a:p>
@@ -1413,7 +1413,7 @@
           <a:p>
             <a:fld id="{C2A8275D-7213-48BE-B460-22A42A5DBE13}" type="datetimeFigureOut">
               <a:rPr lang="ru-RU" smtClean="0"/>
-              <a:t>27.06.2025</a:t>
+              <a:t>19.12.2025</a:t>
             </a:fld>
             <a:endParaRPr lang="ru-RU"/>
           </a:p>
@@ -1825,7 +1825,7 @@
           <a:p>
             <a:fld id="{C2A8275D-7213-48BE-B460-22A42A5DBE13}" type="datetimeFigureOut">
               <a:rPr lang="ru-RU" smtClean="0"/>
-              <a:t>27.06.2025</a:t>
+              <a:t>19.12.2025</a:t>
             </a:fld>
             <a:endParaRPr lang="ru-RU"/>
           </a:p>
@@ -1966,7 +1966,7 @@
           <a:p>
             <a:fld id="{C2A8275D-7213-48BE-B460-22A42A5DBE13}" type="datetimeFigureOut">
               <a:rPr lang="ru-RU" smtClean="0"/>
-              <a:t>27.06.2025</a:t>
+              <a:t>19.12.2025</a:t>
             </a:fld>
             <a:endParaRPr lang="ru-RU"/>
           </a:p>
@@ -2079,7 +2079,7 @@
           <a:p>
             <a:fld id="{C2A8275D-7213-48BE-B460-22A42A5DBE13}" type="datetimeFigureOut">
               <a:rPr lang="ru-RU" smtClean="0"/>
-              <a:t>27.06.2025</a:t>
+              <a:t>19.12.2025</a:t>
             </a:fld>
             <a:endParaRPr lang="ru-RU"/>
           </a:p>
@@ -2390,7 +2390,7 @@
           <a:p>
             <a:fld id="{C2A8275D-7213-48BE-B460-22A42A5DBE13}" type="datetimeFigureOut">
               <a:rPr lang="ru-RU" smtClean="0"/>
-              <a:t>27.06.2025</a:t>
+              <a:t>19.12.2025</a:t>
             </a:fld>
             <a:endParaRPr lang="ru-RU"/>
           </a:p>
@@ -2678,7 +2678,7 @@
           <a:p>
             <a:fld id="{C2A8275D-7213-48BE-B460-22A42A5DBE13}" type="datetimeFigureOut">
               <a:rPr lang="ru-RU" smtClean="0"/>
-              <a:t>27.06.2025</a:t>
+              <a:t>19.12.2025</a:t>
             </a:fld>
             <a:endParaRPr lang="ru-RU"/>
           </a:p>
@@ -2919,7 +2919,7 @@
           <a:p>
             <a:fld id="{C2A8275D-7213-48BE-B460-22A42A5DBE13}" type="datetimeFigureOut">
               <a:rPr lang="ru-RU" smtClean="0"/>
-              <a:t>27.06.2025</a:t>
+              <a:t>19.12.2025</a:t>
             </a:fld>
             <a:endParaRPr lang="ru-RU"/>
           </a:p>
@@ -3365,7 +3365,10 @@
           <a:lstStyle/>
           <a:p>
             <a:r>
-              <a:rPr lang="ru-RU" dirty="0"/>
+              <a:rPr lang="ru-RU" dirty="0">
+                <a:latin typeface="Times New Roman" panose="02020603050405020304" pitchFamily="18" charset="0"/>
+                <a:cs typeface="Times New Roman" panose="02020603050405020304" pitchFamily="18" charset="0"/>
+              </a:rPr>
               <a:t>Разработка программного модуля для контроля параметров гидравлического молота</a:t>
             </a:r>
           </a:p>
@@ -3389,24 +3392,32 @@
         </p:nvSpPr>
         <p:spPr>
           <a:xfrm>
-            <a:off x="6096000" y="4788816"/>
-            <a:ext cx="5847760" cy="1781665"/>
+            <a:off x="7279341" y="5369859"/>
+            <a:ext cx="4912658" cy="1488140"/>
           </a:xfrm>
         </p:spPr>
         <p:txBody>
-          <a:bodyPr/>
+          <a:bodyPr>
+            <a:normAutofit lnSpcReduction="10000"/>
+          </a:bodyPr>
           <a:lstStyle/>
           <a:p>
             <a:pPr algn="l"/>
             <a:r>
-              <a:rPr lang="ru-RU" dirty="0"/>
+              <a:rPr lang="ru-RU" dirty="0">
+                <a:latin typeface="Times New Roman" panose="02020603050405020304" pitchFamily="18" charset="0"/>
+                <a:cs typeface="Times New Roman" panose="02020603050405020304" pitchFamily="18" charset="0"/>
+              </a:rPr>
               <a:t>Выполнил: студент группы № 22357 Климов Богдан Алексеевич</a:t>
             </a:r>
           </a:p>
           <a:p>
             <a:pPr algn="l"/>
             <a:r>
-              <a:rPr lang="ru-RU" dirty="0"/>
+              <a:rPr lang="ru-RU" dirty="0">
+                <a:latin typeface="Times New Roman" panose="02020603050405020304" pitchFamily="18" charset="0"/>
+                <a:cs typeface="Times New Roman" panose="02020603050405020304" pitchFamily="18" charset="0"/>
+              </a:rPr>
               <a:t>Научный руководитель: к. т. н. Котов Константин Юрьевич</a:t>
             </a:r>
           </a:p>
@@ -3464,7 +3475,10 @@
           <a:lstStyle/>
           <a:p>
             <a:r>
-              <a:rPr lang="ru-RU" dirty="0"/>
+              <a:rPr lang="ru-RU" dirty="0">
+                <a:latin typeface="Times New Roman" panose="02020603050405020304" pitchFamily="18" charset="0"/>
+                <a:cs typeface="Times New Roman" panose="02020603050405020304" pitchFamily="18" charset="0"/>
+              </a:rPr>
               <a:t>Дальнейшее развитие</a:t>
             </a:r>
           </a:p>
@@ -3502,39 +3516,60 @@
               <a:buNone/>
             </a:pPr>
             <a:r>
-              <a:rPr lang="ru-RU" dirty="0"/>
+              <a:rPr lang="ru-RU" dirty="0">
+                <a:latin typeface="Times New Roman" panose="02020603050405020304" pitchFamily="18" charset="0"/>
+                <a:cs typeface="Times New Roman" panose="02020603050405020304" pitchFamily="18" charset="0"/>
+              </a:rPr>
               <a:t>Планы по модернизации:</a:t>
             </a:r>
           </a:p>
           <a:p>
             <a:r>
-              <a:rPr lang="ru-RU" dirty="0"/>
+              <a:rPr lang="ru-RU" dirty="0">
+                <a:latin typeface="Times New Roman" panose="02020603050405020304" pitchFamily="18" charset="0"/>
+                <a:cs typeface="Times New Roman" panose="02020603050405020304" pitchFamily="18" charset="0"/>
+              </a:rPr>
               <a:t>Расширение датчиков – добавление </a:t>
             </a:r>
             <a:r>
-              <a:rPr lang="ru-RU" dirty="0" err="1"/>
+              <a:rPr lang="ru-RU" dirty="0" err="1">
+                <a:latin typeface="Times New Roman" panose="02020603050405020304" pitchFamily="18" charset="0"/>
+                <a:cs typeface="Times New Roman" panose="02020603050405020304" pitchFamily="18" charset="0"/>
+              </a:rPr>
               <a:t>виброметрии</a:t>
             </a:r>
             <a:r>
-              <a:rPr lang="ru-RU" dirty="0"/>
+              <a:rPr lang="ru-RU" dirty="0">
+                <a:latin typeface="Times New Roman" panose="02020603050405020304" pitchFamily="18" charset="0"/>
+                <a:cs typeface="Times New Roman" panose="02020603050405020304" pitchFamily="18" charset="0"/>
+              </a:rPr>
               <a:t> и контроля качества металла.</a:t>
             </a:r>
           </a:p>
           <a:p>
             <a:r>
-              <a:rPr lang="ru-RU" dirty="0"/>
+              <a:rPr lang="ru-RU" dirty="0">
+                <a:latin typeface="Times New Roman" panose="02020603050405020304" pitchFamily="18" charset="0"/>
+                <a:cs typeface="Times New Roman" panose="02020603050405020304" pitchFamily="18" charset="0"/>
+              </a:rPr>
               <a:t>ИИ-оптимизация – машинное обучение для прогнозирования износа и настройки параметров.</a:t>
             </a:r>
           </a:p>
           <a:p>
             <a:r>
-              <a:rPr lang="ru-RU" dirty="0"/>
+              <a:rPr lang="ru-RU" dirty="0">
+                <a:latin typeface="Times New Roman" panose="02020603050405020304" pitchFamily="18" charset="0"/>
+                <a:cs typeface="Times New Roman" panose="02020603050405020304" pitchFamily="18" charset="0"/>
+              </a:rPr>
               <a:t>Промышленные испытания – внедрение на молоте МШ-2 и тестирование в реальных условиях.</a:t>
             </a:r>
           </a:p>
           <a:p>
             <a:r>
-              <a:rPr lang="ru-RU" dirty="0"/>
+              <a:rPr lang="ru-RU" dirty="0">
+                <a:latin typeface="Times New Roman" panose="02020603050405020304" pitchFamily="18" charset="0"/>
+                <a:cs typeface="Times New Roman" panose="02020603050405020304" pitchFamily="18" charset="0"/>
+              </a:rPr>
               <a:t>Интеграция с SCADA – подключение к общей системе управления производством.</a:t>
             </a:r>
           </a:p>
@@ -3543,30 +3578,39 @@
               <a:buNone/>
             </a:pPr>
             <a:r>
-              <a:rPr lang="ru-RU" dirty="0"/>
+              <a:rPr lang="ru-RU" dirty="0">
+                <a:latin typeface="Times New Roman" panose="02020603050405020304" pitchFamily="18" charset="0"/>
+                <a:cs typeface="Times New Roman" panose="02020603050405020304" pitchFamily="18" charset="0"/>
+              </a:rPr>
               <a:t>Перспективы:</a:t>
             </a:r>
           </a:p>
           <a:p>
             <a:r>
-              <a:rPr lang="ru-RU" dirty="0"/>
-              <a:t>Повышение точности на 15-20%</a:t>
-            </a:r>
-          </a:p>
-          <a:p>
-            <a:r>
-              <a:rPr lang="ru-RU" dirty="0"/>
-              <a:t>Снижение аварийности</a:t>
-            </a:r>
-          </a:p>
-          <a:p>
-            <a:r>
-              <a:rPr lang="ru-RU" dirty="0"/>
-              <a:t>Возможность тиражирования на другие типы прессов</a:t>
-            </a:r>
-          </a:p>
-          <a:p>
-            <a:endParaRPr lang="ru-RU" dirty="0"/>
+              <a:rPr lang="ru-RU" dirty="0">
+                <a:latin typeface="Times New Roman" panose="02020603050405020304" pitchFamily="18" charset="0"/>
+                <a:cs typeface="Times New Roman" panose="02020603050405020304" pitchFamily="18" charset="0"/>
+              </a:rPr>
+              <a:t>Повышение точности на 15-20%.</a:t>
+            </a:r>
+          </a:p>
+          <a:p>
+            <a:r>
+              <a:rPr lang="ru-RU" dirty="0">
+                <a:latin typeface="Times New Roman" panose="02020603050405020304" pitchFamily="18" charset="0"/>
+                <a:cs typeface="Times New Roman" panose="02020603050405020304" pitchFamily="18" charset="0"/>
+              </a:rPr>
+              <a:t>Снижение аварийности.</a:t>
+            </a:r>
+          </a:p>
+          <a:p>
+            <a:r>
+              <a:rPr lang="ru-RU" dirty="0">
+                <a:latin typeface="Times New Roman" panose="02020603050405020304" pitchFamily="18" charset="0"/>
+                <a:cs typeface="Times New Roman" panose="02020603050405020304" pitchFamily="18" charset="0"/>
+              </a:rPr>
+              <a:t>Возможность тиражирования на другие типы прессов.</a:t>
+            </a:r>
           </a:p>
         </p:txBody>
       </p:sp>
@@ -3630,7 +3674,10 @@
           <a:p>
             <a:pPr algn="ctr"/>
             <a:r>
-              <a:rPr lang="ru-RU" sz="5400" dirty="0"/>
+              <a:rPr lang="ru-RU" sz="5400" dirty="0">
+                <a:latin typeface="Times New Roman" panose="02020603050405020304" pitchFamily="18" charset="0"/>
+                <a:cs typeface="Times New Roman" panose="02020603050405020304" pitchFamily="18" charset="0"/>
+              </a:rPr>
               <a:t>Спасибо за внимание!</a:t>
             </a:r>
           </a:p>
@@ -3688,7 +3735,10 @@
           <a:lstStyle/>
           <a:p>
             <a:r>
-              <a:rPr lang="ru-RU" dirty="0"/>
+              <a:rPr lang="ru-RU" dirty="0">
+                <a:latin typeface="Times New Roman" panose="02020603050405020304" pitchFamily="18" charset="0"/>
+                <a:cs typeface="Times New Roman" panose="02020603050405020304" pitchFamily="18" charset="0"/>
+              </a:rPr>
               <a:t>Область исследования</a:t>
             </a:r>
           </a:p>
@@ -3724,7 +3774,10 @@
               <a:buNone/>
             </a:pPr>
             <a:r>
-              <a:rPr lang="ru-RU" dirty="0"/>
+              <a:rPr lang="ru-RU" dirty="0">
+                <a:latin typeface="Times New Roman" panose="02020603050405020304" pitchFamily="18" charset="0"/>
+                <a:cs typeface="Times New Roman" panose="02020603050405020304" pitchFamily="18" charset="0"/>
+              </a:rPr>
               <a:t>Гидравлический молот представляет собой специализированное оборудование для ковки и штамповки, функционирующее за счёт энергии, передаваемой гидравлической жидкостью. В процессе работы кинетическая энергия подвижных элементов преобразуется в усилие, необходимое для пластической деформации нагретой заготовки с целью придания ей требуемой конфигурации.</a:t>
             </a:r>
           </a:p>
@@ -3781,7 +3834,7 @@
         <p:spPr>
           <a:xfrm>
             <a:off x="7753800" y="6176962"/>
-            <a:ext cx="3600000" cy="360000"/>
+            <a:ext cx="3600000" cy="276999"/>
           </a:xfrm>
           <a:prstGeom prst="rect">
             <a:avLst/>
@@ -3796,7 +3849,10 @@
           <a:p>
             <a:pPr algn="ctr"/>
             <a:r>
-              <a:rPr lang="ru-RU" sz="1200" dirty="0"/>
+              <a:rPr lang="ru-RU" sz="1200" dirty="0">
+                <a:latin typeface="Times New Roman" panose="02020603050405020304" pitchFamily="18" charset="0"/>
+                <a:cs typeface="Times New Roman" panose="02020603050405020304" pitchFamily="18" charset="0"/>
+              </a:rPr>
               <a:t>Штамповочный молот МШ-3</a:t>
             </a:r>
           </a:p>
@@ -3854,7 +3910,10 @@
           <a:lstStyle/>
           <a:p>
             <a:r>
-              <a:rPr lang="ru-RU" dirty="0"/>
+              <a:rPr lang="ru-RU" dirty="0">
+                <a:latin typeface="Times New Roman" panose="02020603050405020304" pitchFamily="18" charset="0"/>
+                <a:cs typeface="Times New Roman" panose="02020603050405020304" pitchFamily="18" charset="0"/>
+              </a:rPr>
               <a:t>Актуальность</a:t>
             </a:r>
           </a:p>
@@ -3892,31 +3951,46 @@
               <a:buNone/>
             </a:pPr>
             <a:r>
-              <a:rPr lang="ru-RU" dirty="0"/>
+              <a:rPr lang="ru-RU" dirty="0">
+                <a:latin typeface="Times New Roman" panose="02020603050405020304" pitchFamily="18" charset="0"/>
+                <a:cs typeface="Times New Roman" panose="02020603050405020304" pitchFamily="18" charset="0"/>
+              </a:rPr>
               <a:t>Проблемы существующих систем:</a:t>
             </a:r>
           </a:p>
           <a:p>
             <a:r>
-              <a:rPr lang="ru-RU" dirty="0"/>
+              <a:rPr lang="ru-RU" dirty="0">
+                <a:latin typeface="Times New Roman" panose="02020603050405020304" pitchFamily="18" charset="0"/>
+                <a:cs typeface="Times New Roman" panose="02020603050405020304" pitchFamily="18" charset="0"/>
+              </a:rPr>
               <a:t>Устаревшее управление – большинство промышленных молотов используют механические и аналоговые системы 1970-х годов.</a:t>
             </a:r>
           </a:p>
           <a:p>
             <a:r>
-              <a:rPr lang="ru-RU" dirty="0"/>
+              <a:rPr lang="ru-RU" dirty="0">
+                <a:latin typeface="Times New Roman" panose="02020603050405020304" pitchFamily="18" charset="0"/>
+                <a:cs typeface="Times New Roman" panose="02020603050405020304" pitchFamily="18" charset="0"/>
+              </a:rPr>
               <a:t>Ручной контроль – оператор вручную регулирует параметры, что приводит к ошибкам и нестабильности.</a:t>
             </a:r>
           </a:p>
           <a:p>
             <a:r>
-              <a:rPr lang="ru-RU" dirty="0"/>
+              <a:rPr lang="ru-RU" dirty="0">
+                <a:latin typeface="Times New Roman" panose="02020603050405020304" pitchFamily="18" charset="0"/>
+                <a:cs typeface="Times New Roman" panose="02020603050405020304" pitchFamily="18" charset="0"/>
+              </a:rPr>
               <a:t>Энергопотери – до 40% энергии тратится впустую из-за неоптимального управления.</a:t>
             </a:r>
           </a:p>
           <a:p>
             <a:r>
-              <a:rPr lang="ru-RU" dirty="0"/>
+              <a:rPr lang="ru-RU" dirty="0">
+                <a:latin typeface="Times New Roman" panose="02020603050405020304" pitchFamily="18" charset="0"/>
+                <a:cs typeface="Times New Roman" panose="02020603050405020304" pitchFamily="18" charset="0"/>
+              </a:rPr>
               <a:t>Гидравлические удары – резкие перепады давления снижают ресурс оборудования.</a:t>
             </a:r>
           </a:p>
@@ -3925,19 +3999,28 @@
               <a:buNone/>
             </a:pPr>
             <a:r>
-              <a:rPr lang="ru-RU" dirty="0"/>
+              <a:rPr lang="ru-RU" dirty="0">
+                <a:latin typeface="Times New Roman" panose="02020603050405020304" pitchFamily="18" charset="0"/>
+                <a:cs typeface="Times New Roman" panose="02020603050405020304" pitchFamily="18" charset="0"/>
+              </a:rPr>
               <a:t>Решение:</a:t>
             </a:r>
           </a:p>
           <a:p>
             <a:r>
-              <a:rPr lang="ru-RU" dirty="0"/>
+              <a:rPr lang="ru-RU" dirty="0">
+                <a:latin typeface="Times New Roman" panose="02020603050405020304" pitchFamily="18" charset="0"/>
+                <a:cs typeface="Times New Roman" panose="02020603050405020304" pitchFamily="18" charset="0"/>
+              </a:rPr>
               <a:t>Цифровая автоматизация – точный контроль параметров в реальном времени.</a:t>
             </a:r>
           </a:p>
           <a:p>
             <a:r>
-              <a:rPr lang="ru-RU" dirty="0"/>
+              <a:rPr lang="ru-RU" dirty="0">
+                <a:latin typeface="Times New Roman" panose="02020603050405020304" pitchFamily="18" charset="0"/>
+                <a:cs typeface="Times New Roman" panose="02020603050405020304" pitchFamily="18" charset="0"/>
+              </a:rPr>
               <a:t>ROS-платформа – гибкость, масштабируемость, открытый код.</a:t>
             </a:r>
           </a:p>
@@ -3995,7 +4078,10 @@
           <a:lstStyle/>
           <a:p>
             <a:r>
-              <a:rPr lang="ru-RU" dirty="0"/>
+              <a:rPr lang="ru-RU" dirty="0">
+                <a:latin typeface="Times New Roman" panose="02020603050405020304" pitchFamily="18" charset="0"/>
+                <a:cs typeface="Times New Roman" panose="02020603050405020304" pitchFamily="18" charset="0"/>
+              </a:rPr>
               <a:t>Цель и задачи</a:t>
             </a:r>
           </a:p>
@@ -4026,7 +4112,10 @@
               <a:buNone/>
             </a:pPr>
             <a:r>
-              <a:rPr lang="ru-RU" dirty="0"/>
+              <a:rPr lang="ru-RU" dirty="0">
+                <a:latin typeface="Times New Roman" panose="02020603050405020304" pitchFamily="18" charset="0"/>
+                <a:cs typeface="Times New Roman" panose="02020603050405020304" pitchFamily="18" charset="0"/>
+              </a:rPr>
               <a:t>Цель: Создание аппаратно-программного комплекса для автоматизированного контроля параметров гидравлического молота в реальном времени.</a:t>
             </a:r>
           </a:p>
@@ -4035,38 +4124,56 @@
               <a:buNone/>
             </a:pPr>
             <a:r>
-              <a:rPr lang="ru-RU" dirty="0"/>
+              <a:rPr lang="ru-RU" dirty="0">
+                <a:latin typeface="Times New Roman" panose="02020603050405020304" pitchFamily="18" charset="0"/>
+                <a:cs typeface="Times New Roman" panose="02020603050405020304" pitchFamily="18" charset="0"/>
+              </a:rPr>
               <a:t>Задачи:</a:t>
             </a:r>
           </a:p>
           <a:p>
             <a:r>
-              <a:rPr lang="ru-RU" dirty="0"/>
-              <a:t>Разработка схемы подключения датчиков</a:t>
-            </a:r>
-          </a:p>
-          <a:p>
-            <a:r>
-              <a:rPr lang="ru-RU" dirty="0"/>
-              <a:t>Создание ROS-модулей обработки данных</a:t>
-            </a:r>
-          </a:p>
-          <a:p>
-            <a:r>
-              <a:rPr lang="ru-RU" dirty="0"/>
-              <a:t>Интеграция системы управления клапанами</a:t>
-            </a:r>
-          </a:p>
-          <a:p>
-            <a:r>
-              <a:rPr lang="ru-RU" dirty="0"/>
-              <a:t>Тестирование на лабораторном стенде</a:t>
-            </a:r>
-          </a:p>
-          <a:p>
-            <a:r>
-              <a:rPr lang="ru-RU" dirty="0"/>
-              <a:t>Создание алгоритмов управления</a:t>
+              <a:rPr lang="ru-RU" dirty="0">
+                <a:latin typeface="Times New Roman" panose="02020603050405020304" pitchFamily="18" charset="0"/>
+                <a:cs typeface="Times New Roman" panose="02020603050405020304" pitchFamily="18" charset="0"/>
+              </a:rPr>
+              <a:t>Разработка схемы подключения датчиков.</a:t>
+            </a:r>
+          </a:p>
+          <a:p>
+            <a:r>
+              <a:rPr lang="ru-RU" dirty="0">
+                <a:latin typeface="Times New Roman" panose="02020603050405020304" pitchFamily="18" charset="0"/>
+                <a:cs typeface="Times New Roman" panose="02020603050405020304" pitchFamily="18" charset="0"/>
+              </a:rPr>
+              <a:t>Создание ROS-модулей обработки данных.</a:t>
+            </a:r>
+          </a:p>
+          <a:p>
+            <a:r>
+              <a:rPr lang="ru-RU" dirty="0">
+                <a:latin typeface="Times New Roman" panose="02020603050405020304" pitchFamily="18" charset="0"/>
+                <a:cs typeface="Times New Roman" panose="02020603050405020304" pitchFamily="18" charset="0"/>
+              </a:rPr>
+              <a:t>Интеграция системы управления клапанами.</a:t>
+            </a:r>
+          </a:p>
+          <a:p>
+            <a:r>
+              <a:rPr lang="ru-RU" dirty="0">
+                <a:latin typeface="Times New Roman" panose="02020603050405020304" pitchFamily="18" charset="0"/>
+                <a:cs typeface="Times New Roman" panose="02020603050405020304" pitchFamily="18" charset="0"/>
+              </a:rPr>
+              <a:t>Тестирование на лабораторном стенде.</a:t>
+            </a:r>
+          </a:p>
+          <a:p>
+            <a:r>
+              <a:rPr lang="ru-RU" dirty="0">
+                <a:latin typeface="Times New Roman" panose="02020603050405020304" pitchFamily="18" charset="0"/>
+                <a:cs typeface="Times New Roman" panose="02020603050405020304" pitchFamily="18" charset="0"/>
+              </a:rPr>
+              <a:t>Создание алгоритмов управления.</a:t>
             </a:r>
           </a:p>
         </p:txBody>
@@ -4123,7 +4230,10 @@
           <a:lstStyle/>
           <a:p>
             <a:r>
-              <a:rPr lang="ru-RU" dirty="0"/>
+              <a:rPr lang="ru-RU" dirty="0">
+                <a:latin typeface="Times New Roman" panose="02020603050405020304" pitchFamily="18" charset="0"/>
+                <a:cs typeface="Times New Roman" panose="02020603050405020304" pitchFamily="18" charset="0"/>
+              </a:rPr>
               <a:t>Аппаратная часть</a:t>
             </a:r>
           </a:p>
@@ -4297,7 +4407,7 @@
         <p:spPr>
           <a:xfrm>
             <a:off x="5735658" y="5591246"/>
-            <a:ext cx="5400000" cy="360000"/>
+            <a:ext cx="5400000" cy="276999"/>
           </a:xfrm>
           <a:prstGeom prst="rect">
             <a:avLst/>
@@ -4312,7 +4422,10 @@
           <a:p>
             <a:pPr algn="ctr"/>
             <a:r>
-              <a:rPr lang="ru-RU" sz="1200" dirty="0"/>
+              <a:rPr lang="ru-RU" sz="1200" dirty="0">
+                <a:latin typeface="Times New Roman" panose="02020603050405020304" pitchFamily="18" charset="0"/>
+                <a:cs typeface="Times New Roman" panose="02020603050405020304" pitchFamily="18" charset="0"/>
+              </a:rPr>
               <a:t>Схема установки гидравлического молота МШ-3</a:t>
             </a:r>
           </a:p>
@@ -4333,7 +4446,7 @@
         <p:spPr>
           <a:xfrm>
             <a:off x="1557971" y="6176962"/>
-            <a:ext cx="2879725" cy="360000"/>
+            <a:ext cx="2879725" cy="276999"/>
           </a:xfrm>
           <a:prstGeom prst="rect">
             <a:avLst/>
@@ -4348,7 +4461,10 @@
           <a:p>
             <a:pPr algn="ctr"/>
             <a:r>
-              <a:rPr lang="ru-RU" sz="1200" dirty="0"/>
+              <a:rPr lang="ru-RU" sz="1200" dirty="0">
+                <a:latin typeface="Times New Roman" panose="02020603050405020304" pitchFamily="18" charset="0"/>
+                <a:cs typeface="Times New Roman" panose="02020603050405020304" pitchFamily="18" charset="0"/>
+              </a:rPr>
               <a:t>Телекоммуникационный шкаф</a:t>
             </a:r>
           </a:p>
@@ -4369,7 +4485,7 @@
         <p:spPr>
           <a:xfrm>
             <a:off x="838200" y="3625622"/>
-            <a:ext cx="4897456" cy="360000"/>
+            <a:ext cx="4897456" cy="276999"/>
           </a:xfrm>
           <a:prstGeom prst="rect">
             <a:avLst/>
@@ -4384,18 +4500,30 @@
           <a:p>
             <a:pPr algn="ctr"/>
             <a:r>
-              <a:rPr lang="it-IT" sz="1200" dirty="0"/>
+              <a:rPr lang="it-IT" sz="1200" dirty="0">
+                <a:latin typeface="Times New Roman" panose="02020603050405020304" pitchFamily="18" charset="0"/>
+                <a:cs typeface="Times New Roman" panose="02020603050405020304" pitchFamily="18" charset="0"/>
+              </a:rPr>
               <a:t>Raspberry PI 3 Model B+ </a:t>
             </a:r>
             <a:r>
-              <a:rPr lang="ru-RU" sz="1200" dirty="0"/>
+              <a:rPr lang="ru-RU" sz="1200" dirty="0">
+                <a:latin typeface="Times New Roman" panose="02020603050405020304" pitchFamily="18" charset="0"/>
+                <a:cs typeface="Times New Roman" panose="02020603050405020304" pitchFamily="18" charset="0"/>
+              </a:rPr>
               <a:t>и </a:t>
             </a:r>
             <a:r>
-              <a:rPr lang="en-US" sz="1200" dirty="0"/>
+              <a:rPr lang="en-US" sz="1200" dirty="0">
+                <a:latin typeface="Times New Roman" panose="02020603050405020304" pitchFamily="18" charset="0"/>
+                <a:cs typeface="Times New Roman" panose="02020603050405020304" pitchFamily="18" charset="0"/>
+              </a:rPr>
               <a:t>High-Precision AD/DA Expansion Board</a:t>
             </a:r>
-            <a:endParaRPr lang="ru-RU" sz="1200" dirty="0"/>
+            <a:endParaRPr lang="ru-RU" sz="1200" dirty="0">
+              <a:latin typeface="Times New Roman" panose="02020603050405020304" pitchFamily="18" charset="0"/>
+              <a:cs typeface="Times New Roman" panose="02020603050405020304" pitchFamily="18" charset="0"/>
+            </a:endParaRPr>
           </a:p>
         </p:txBody>
       </p:sp>
@@ -4451,7 +4579,10 @@
           <a:lstStyle/>
           <a:p>
             <a:r>
-              <a:rPr lang="ru-RU" dirty="0"/>
+              <a:rPr lang="ru-RU" dirty="0">
+                <a:latin typeface="Times New Roman" panose="02020603050405020304" pitchFamily="18" charset="0"/>
+                <a:cs typeface="Times New Roman" panose="02020603050405020304" pitchFamily="18" charset="0"/>
+              </a:rPr>
               <a:t>Датчики и схемы подключения</a:t>
             </a:r>
           </a:p>
@@ -4832,7 +4963,7 @@
         <p:spPr>
           <a:xfrm>
             <a:off x="838199" y="3539427"/>
-            <a:ext cx="3239999" cy="360000"/>
+            <a:ext cx="3239999" cy="276999"/>
           </a:xfrm>
           <a:prstGeom prst="rect">
             <a:avLst/>
@@ -4847,7 +4978,10 @@
           <a:p>
             <a:pPr algn="ctr"/>
             <a:r>
-              <a:rPr lang="ru-RU" sz="1200" dirty="0"/>
+              <a:rPr lang="ru-RU" sz="1200" dirty="0">
+                <a:latin typeface="Times New Roman" panose="02020603050405020304" pitchFamily="18" charset="0"/>
+                <a:cs typeface="Times New Roman" panose="02020603050405020304" pitchFamily="18" charset="0"/>
+              </a:rPr>
               <a:t>Датчик давления МИДА-ДИ-13П-1</a:t>
             </a:r>
           </a:p>
@@ -4867,8 +5001,8 @@
         </p:nvSpPr>
         <p:spPr>
           <a:xfrm>
-            <a:off x="4618200" y="3955404"/>
-            <a:ext cx="2520000" cy="360000"/>
+            <a:off x="4547629" y="3982597"/>
+            <a:ext cx="2661141" cy="276999"/>
           </a:xfrm>
           <a:prstGeom prst="rect">
             <a:avLst/>
@@ -4883,14 +5017,23 @@
           <a:p>
             <a:pPr algn="ctr"/>
             <a:r>
-              <a:rPr lang="ru-RU" sz="1200" dirty="0"/>
+              <a:rPr lang="ru-RU" sz="1200" dirty="0">
+                <a:latin typeface="Times New Roman" panose="02020603050405020304" pitchFamily="18" charset="0"/>
+                <a:cs typeface="Times New Roman" panose="02020603050405020304" pitchFamily="18" charset="0"/>
+              </a:rPr>
               <a:t>Концевой датчик </a:t>
             </a:r>
             <a:r>
-              <a:rPr lang="en-US" sz="1200" dirty="0"/>
+              <a:rPr lang="en-US" sz="1200" dirty="0">
+                <a:latin typeface="Times New Roman" panose="02020603050405020304" pitchFamily="18" charset="0"/>
+                <a:cs typeface="Times New Roman" panose="02020603050405020304" pitchFamily="18" charset="0"/>
+              </a:rPr>
               <a:t>ISN FT4A-31P-8-LZ</a:t>
             </a:r>
-            <a:endParaRPr lang="ru-RU" sz="1200" dirty="0"/>
+            <a:endParaRPr lang="ru-RU" sz="1200" dirty="0">
+              <a:latin typeface="Times New Roman" panose="02020603050405020304" pitchFamily="18" charset="0"/>
+              <a:cs typeface="Times New Roman" panose="02020603050405020304" pitchFamily="18" charset="0"/>
+            </a:endParaRPr>
           </a:p>
         </p:txBody>
       </p:sp>
@@ -4909,7 +5052,7 @@
         <p:spPr>
           <a:xfrm>
             <a:off x="763571" y="6176962"/>
-            <a:ext cx="5040000" cy="360000"/>
+            <a:ext cx="5040000" cy="276999"/>
           </a:xfrm>
           <a:prstGeom prst="rect">
             <a:avLst/>
@@ -4924,7 +5067,10 @@
           <a:p>
             <a:pPr algn="ctr"/>
             <a:r>
-              <a:rPr lang="ru-RU" sz="1200" dirty="0"/>
+              <a:rPr lang="ru-RU" sz="1200" dirty="0">
+                <a:latin typeface="Times New Roman" panose="02020603050405020304" pitchFamily="18" charset="0"/>
+                <a:cs typeface="Times New Roman" panose="02020603050405020304" pitchFamily="18" charset="0"/>
+              </a:rPr>
               <a:t>Пирометр Кельвин ИКС 485-600</a:t>
             </a:r>
           </a:p>
@@ -4945,7 +5091,7 @@
         <p:spPr>
           <a:xfrm>
             <a:off x="8114074" y="6316385"/>
-            <a:ext cx="3600000" cy="360000"/>
+            <a:ext cx="3600000" cy="276999"/>
           </a:xfrm>
           <a:prstGeom prst="rect">
             <a:avLst/>
@@ -4960,7 +5106,10 @@
           <a:p>
             <a:pPr algn="ctr"/>
             <a:r>
-              <a:rPr lang="ru-RU" sz="1200" dirty="0"/>
+              <a:rPr lang="ru-RU" sz="1200" dirty="0">
+                <a:latin typeface="Times New Roman" panose="02020603050405020304" pitchFamily="18" charset="0"/>
+                <a:cs typeface="Times New Roman" panose="02020603050405020304" pitchFamily="18" charset="0"/>
+              </a:rPr>
               <a:t>Универсальный модуль взаимодействия ЛИР-919Д</a:t>
             </a:r>
           </a:p>
@@ -4980,8 +5129,8 @@
         </p:nvSpPr>
         <p:spPr>
           <a:xfrm>
-            <a:off x="7753937" y="3171186"/>
-            <a:ext cx="4320000" cy="360000"/>
+            <a:off x="7678200" y="3162445"/>
+            <a:ext cx="4462902" cy="276999"/>
           </a:xfrm>
           <a:prstGeom prst="rect">
             <a:avLst/>
@@ -4996,7 +5145,10 @@
           <a:p>
             <a:pPr algn="ctr"/>
             <a:r>
-              <a:rPr lang="ru-RU" sz="1200" dirty="0"/>
+              <a:rPr lang="ru-RU" sz="1200" dirty="0">
+                <a:latin typeface="Times New Roman" panose="02020603050405020304" pitchFamily="18" charset="0"/>
+                <a:cs typeface="Times New Roman" panose="02020603050405020304" pitchFamily="18" charset="0"/>
+              </a:rPr>
               <a:t>Линейка и считывающая головка ЛИР-МИ3-05-ПИ-1-1,0-B(DB9)</a:t>
             </a:r>
           </a:p>
@@ -5054,7 +5206,10 @@
           <a:lstStyle/>
           <a:p>
             <a:r>
-              <a:rPr lang="ru-RU" dirty="0"/>
+              <a:rPr lang="ru-RU" dirty="0">
+                <a:latin typeface="Times New Roman" panose="02020603050405020304" pitchFamily="18" charset="0"/>
+                <a:cs typeface="Times New Roman" panose="02020603050405020304" pitchFamily="18" charset="0"/>
+              </a:rPr>
               <a:t>Модули обработки сигналов</a:t>
             </a:r>
           </a:p>
@@ -5092,44 +5247,71 @@
               <a:buNone/>
             </a:pPr>
             <a:r>
-              <a:rPr lang="ru-RU" dirty="0"/>
+              <a:rPr lang="ru-RU" dirty="0">
+                <a:latin typeface="Times New Roman" panose="02020603050405020304" pitchFamily="18" charset="0"/>
+                <a:cs typeface="Times New Roman" panose="02020603050405020304" pitchFamily="18" charset="0"/>
+              </a:rPr>
               <a:t>Основные характеристики АЦП:</a:t>
             </a:r>
           </a:p>
           <a:p>
             <a:r>
-              <a:rPr lang="ru-RU" dirty="0"/>
+              <a:rPr lang="ru-RU" dirty="0">
+                <a:latin typeface="Times New Roman" panose="02020603050405020304" pitchFamily="18" charset="0"/>
+                <a:cs typeface="Times New Roman" panose="02020603050405020304" pitchFamily="18" charset="0"/>
+              </a:rPr>
               <a:t>Модель: </a:t>
             </a:r>
             <a:r>
-              <a:rPr lang="en-US" dirty="0"/>
+              <a:rPr lang="en-US" dirty="0">
+                <a:latin typeface="Times New Roman" panose="02020603050405020304" pitchFamily="18" charset="0"/>
+                <a:cs typeface="Times New Roman" panose="02020603050405020304" pitchFamily="18" charset="0"/>
+              </a:rPr>
               <a:t>ADS1256 (24-</a:t>
             </a:r>
             <a:r>
-              <a:rPr lang="ru-RU" dirty="0"/>
+              <a:rPr lang="ru-RU" dirty="0">
+                <a:latin typeface="Times New Roman" panose="02020603050405020304" pitchFamily="18" charset="0"/>
+                <a:cs typeface="Times New Roman" panose="02020603050405020304" pitchFamily="18" charset="0"/>
+              </a:rPr>
               <a:t>битный)</a:t>
             </a:r>
           </a:p>
           <a:p>
             <a:r>
-              <a:rPr lang="ru-RU" dirty="0"/>
+              <a:rPr lang="ru-RU" dirty="0">
+                <a:latin typeface="Times New Roman" panose="02020603050405020304" pitchFamily="18" charset="0"/>
+                <a:cs typeface="Times New Roman" panose="02020603050405020304" pitchFamily="18" charset="0"/>
+              </a:rPr>
               <a:t>Количество каналов: 8</a:t>
             </a:r>
           </a:p>
           <a:p>
             <a:r>
-              <a:rPr lang="ru-RU" dirty="0"/>
+              <a:rPr lang="ru-RU" dirty="0">
+                <a:latin typeface="Times New Roman" panose="02020603050405020304" pitchFamily="18" charset="0"/>
+                <a:cs typeface="Times New Roman" panose="02020603050405020304" pitchFamily="18" charset="0"/>
+              </a:rPr>
               <a:t>Интерфейс: </a:t>
             </a:r>
             <a:r>
-              <a:rPr lang="en-US" dirty="0"/>
+              <a:rPr lang="en-US" dirty="0">
+                <a:latin typeface="Times New Roman" panose="02020603050405020304" pitchFamily="18" charset="0"/>
+                <a:cs typeface="Times New Roman" panose="02020603050405020304" pitchFamily="18" charset="0"/>
+              </a:rPr>
               <a:t>SPI</a:t>
             </a:r>
-            <a:endParaRPr lang="ru-RU" dirty="0"/>
-          </a:p>
-          <a:p>
-            <a:r>
-              <a:rPr lang="ru-RU" dirty="0"/>
+            <a:endParaRPr lang="ru-RU" dirty="0">
+              <a:latin typeface="Times New Roman" panose="02020603050405020304" pitchFamily="18" charset="0"/>
+              <a:cs typeface="Times New Roman" panose="02020603050405020304" pitchFamily="18" charset="0"/>
+            </a:endParaRPr>
+          </a:p>
+          <a:p>
+            <a:r>
+              <a:rPr lang="ru-RU" dirty="0">
+                <a:latin typeface="Times New Roman" panose="02020603050405020304" pitchFamily="18" charset="0"/>
+                <a:cs typeface="Times New Roman" panose="02020603050405020304" pitchFamily="18" charset="0"/>
+              </a:rPr>
               <a:t>Входной диапазон: ±5 В</a:t>
             </a:r>
           </a:p>
@@ -5138,46 +5320,67 @@
               <a:buNone/>
             </a:pPr>
             <a:r>
-              <a:rPr lang="ru-RU" dirty="0"/>
+              <a:rPr lang="ru-RU" dirty="0">
+                <a:latin typeface="Times New Roman" panose="02020603050405020304" pitchFamily="18" charset="0"/>
+                <a:cs typeface="Times New Roman" panose="02020603050405020304" pitchFamily="18" charset="0"/>
+              </a:rPr>
               <a:t>Основные характеристики ЦАП:</a:t>
             </a:r>
           </a:p>
           <a:p>
             <a:r>
-              <a:rPr lang="ru-RU" dirty="0"/>
+              <a:rPr lang="ru-RU" dirty="0">
+                <a:latin typeface="Times New Roman" panose="02020603050405020304" pitchFamily="18" charset="0"/>
+                <a:cs typeface="Times New Roman" panose="02020603050405020304" pitchFamily="18" charset="0"/>
+              </a:rPr>
               <a:t>Модель: </a:t>
             </a:r>
             <a:r>
-              <a:rPr lang="en-US" dirty="0"/>
+              <a:rPr lang="en-US" dirty="0">
+                <a:latin typeface="Times New Roman" panose="02020603050405020304" pitchFamily="18" charset="0"/>
+                <a:cs typeface="Times New Roman" panose="02020603050405020304" pitchFamily="18" charset="0"/>
+              </a:rPr>
               <a:t>DAC8552 (16-</a:t>
             </a:r>
             <a:r>
-              <a:rPr lang="ru-RU" dirty="0"/>
+              <a:rPr lang="ru-RU" dirty="0">
+                <a:latin typeface="Times New Roman" panose="02020603050405020304" pitchFamily="18" charset="0"/>
+                <a:cs typeface="Times New Roman" panose="02020603050405020304" pitchFamily="18" charset="0"/>
+              </a:rPr>
               <a:t>битный)</a:t>
             </a:r>
           </a:p>
           <a:p>
             <a:r>
-              <a:rPr lang="ru-RU" dirty="0"/>
+              <a:rPr lang="ru-RU" dirty="0">
+                <a:latin typeface="Times New Roman" panose="02020603050405020304" pitchFamily="18" charset="0"/>
+                <a:cs typeface="Times New Roman" panose="02020603050405020304" pitchFamily="18" charset="0"/>
+              </a:rPr>
               <a:t>Количество каналов: 2</a:t>
             </a:r>
           </a:p>
           <a:p>
             <a:r>
-              <a:rPr lang="ru-RU" dirty="0"/>
+              <a:rPr lang="ru-RU" dirty="0">
+                <a:latin typeface="Times New Roman" panose="02020603050405020304" pitchFamily="18" charset="0"/>
+                <a:cs typeface="Times New Roman" panose="02020603050405020304" pitchFamily="18" charset="0"/>
+              </a:rPr>
               <a:t>Интерфейс: SPI</a:t>
             </a:r>
           </a:p>
           <a:p>
             <a:r>
-              <a:rPr lang="ru-RU" dirty="0"/>
+              <a:rPr lang="ru-RU" dirty="0">
+                <a:latin typeface="Times New Roman" panose="02020603050405020304" pitchFamily="18" charset="0"/>
+                <a:cs typeface="Times New Roman" panose="02020603050405020304" pitchFamily="18" charset="0"/>
+              </a:rPr>
               <a:t>Выходной диапазон: 0-5 В</a:t>
             </a:r>
           </a:p>
         </p:txBody>
       </p:sp>
-      <mc:AlternateContent xmlns:mc="http://schemas.openxmlformats.org/markup-compatibility/2006" xmlns:a14="http://schemas.microsoft.com/office/drawing/2010/main">
-        <mc:Choice Requires="a14">
+      <mc:AlternateContent xmlns:mc="http://schemas.openxmlformats.org/markup-compatibility/2006">
+        <mc:Choice xmlns:a14="http://schemas.microsoft.com/office/drawing/2010/main" Requires="a14">
           <p:sp>
             <p:nvSpPr>
               <p:cNvPr id="4" name="Объект 2">
@@ -5375,13 +5578,19 @@
                   <a:buNone/>
                 </a:pPr>
                 <a:r>
-                  <a:rPr lang="ru-RU" dirty="0"/>
+                  <a:rPr lang="ru-RU" dirty="0">
+                    <a:latin typeface="Times New Roman" panose="02020603050405020304" pitchFamily="18" charset="0"/>
+                    <a:cs typeface="Times New Roman" panose="02020603050405020304" pitchFamily="18" charset="0"/>
+                  </a:rPr>
                   <a:t>Формулы преобразования:</a:t>
                 </a:r>
               </a:p>
               <a:p>
                 <a:r>
-                  <a:rPr lang="ru-RU" dirty="0"/>
+                  <a:rPr lang="ru-RU" dirty="0">
+                    <a:latin typeface="Times New Roman" panose="02020603050405020304" pitchFamily="18" charset="0"/>
+                    <a:cs typeface="Times New Roman" panose="02020603050405020304" pitchFamily="18" charset="0"/>
+                  </a:rPr>
                   <a:t>Давление:</a:t>
                 </a:r>
               </a:p>
@@ -5509,14 +5718,20 @@
                     </m:oMath>
                   </m:oMathPara>
                 </a14:m>
-                <a:endParaRPr lang="ru-RU" sz="2400" i="1" dirty="0"/>
+                <a:endParaRPr lang="ru-RU" sz="2400" i="1" dirty="0">
+                  <a:latin typeface="Times New Roman" panose="02020603050405020304" pitchFamily="18" charset="0"/>
+                  <a:cs typeface="Times New Roman" panose="02020603050405020304" pitchFamily="18" charset="0"/>
+                </a:endParaRPr>
               </a:p>
               <a:p>
                 <a:pPr marL="0" indent="0">
                   <a:buNone/>
                 </a:pPr>
                 <a:r>
-                  <a:rPr lang="ru-RU" dirty="0"/>
+                  <a:rPr lang="ru-RU" dirty="0">
+                    <a:latin typeface="Times New Roman" panose="02020603050405020304" pitchFamily="18" charset="0"/>
+                    <a:cs typeface="Times New Roman" panose="02020603050405020304" pitchFamily="18" charset="0"/>
+                  </a:rPr>
                   <a:t>где </a:t>
                 </a:r>
                 <a14:m>
@@ -5530,7 +5745,10 @@
                   </m:oMath>
                 </a14:m>
                 <a:r>
-                  <a:rPr lang="ru-RU" dirty="0"/>
+                  <a:rPr lang="ru-RU" dirty="0">
+                    <a:latin typeface="Times New Roman" panose="02020603050405020304" pitchFamily="18" charset="0"/>
+                    <a:cs typeface="Times New Roman" panose="02020603050405020304" pitchFamily="18" charset="0"/>
+                  </a:rPr>
                   <a:t> – давление в МПа, </a:t>
                 </a:r>
                 <a14:m>
@@ -5544,7 +5762,10 @@
                   </m:oMath>
                 </a14:m>
                 <a:r>
-                  <a:rPr lang="ru-RU" dirty="0"/>
+                  <a:rPr lang="ru-RU" dirty="0">
+                    <a:latin typeface="Times New Roman" panose="02020603050405020304" pitchFamily="18" charset="0"/>
+                    <a:cs typeface="Times New Roman" panose="02020603050405020304" pitchFamily="18" charset="0"/>
+                  </a:rPr>
                   <a:t> – ток в мА, </a:t>
                 </a:r>
                 <a14:m>
@@ -5558,7 +5779,10 @@
                   </m:oMath>
                 </a14:m>
                 <a:r>
-                  <a:rPr lang="ru-RU" dirty="0"/>
+                  <a:rPr lang="ru-RU" dirty="0">
+                    <a:latin typeface="Times New Roman" panose="02020603050405020304" pitchFamily="18" charset="0"/>
+                    <a:cs typeface="Times New Roman" panose="02020603050405020304" pitchFamily="18" charset="0"/>
+                  </a:rPr>
                   <a:t> – измеренное напряжение в вольтах, </a:t>
                 </a:r>
                 <a14:m>
@@ -5591,14 +5815,23 @@
                   </m:oMath>
                 </a14:m>
                 <a:r>
-                  <a:rPr lang="ru-RU" dirty="0"/>
+                  <a:rPr lang="ru-RU" dirty="0">
+                    <a:latin typeface="Times New Roman" panose="02020603050405020304" pitchFamily="18" charset="0"/>
+                    <a:cs typeface="Times New Roman" panose="02020603050405020304" pitchFamily="18" charset="0"/>
+                  </a:rPr>
                   <a:t> = 225 Ом.</a:t>
                 </a:r>
-                <a:endParaRPr lang="en-US" dirty="0"/>
+                <a:endParaRPr lang="en-US" dirty="0">
+                  <a:latin typeface="Times New Roman" panose="02020603050405020304" pitchFamily="18" charset="0"/>
+                  <a:cs typeface="Times New Roman" panose="02020603050405020304" pitchFamily="18" charset="0"/>
+                </a:endParaRPr>
               </a:p>
               <a:p>
                 <a:r>
-                  <a:rPr lang="ru-RU" dirty="0"/>
+                  <a:rPr lang="ru-RU" dirty="0">
+                    <a:latin typeface="Times New Roman" panose="02020603050405020304" pitchFamily="18" charset="0"/>
+                    <a:cs typeface="Times New Roman" panose="02020603050405020304" pitchFamily="18" charset="0"/>
+                  </a:rPr>
                   <a:t>Температура:</a:t>
                 </a:r>
               </a:p>
@@ -5652,14 +5885,20 @@
                     </m:oMath>
                   </m:oMathPara>
                 </a14:m>
-                <a:endParaRPr lang="ru-RU" sz="2400" i="1" dirty="0"/>
+                <a:endParaRPr lang="ru-RU" sz="2400" i="1" dirty="0">
+                  <a:latin typeface="Times New Roman" panose="02020603050405020304" pitchFamily="18" charset="0"/>
+                  <a:cs typeface="Times New Roman" panose="02020603050405020304" pitchFamily="18" charset="0"/>
+                </a:endParaRPr>
               </a:p>
               <a:p>
                 <a:pPr marL="0" indent="0">
                   <a:buNone/>
                 </a:pPr>
                 <a:r>
-                  <a:rPr lang="ru-RU" dirty="0"/>
+                  <a:rPr lang="ru-RU" dirty="0">
+                    <a:latin typeface="Times New Roman" panose="02020603050405020304" pitchFamily="18" charset="0"/>
+                    <a:cs typeface="Times New Roman" panose="02020603050405020304" pitchFamily="18" charset="0"/>
+                  </a:rPr>
                   <a:t>где </a:t>
                 </a:r>
                 <a14:m>
@@ -5673,7 +5912,10 @@
                   </m:oMath>
                 </a14:m>
                 <a:r>
-                  <a:rPr lang="ru-RU" dirty="0"/>
+                  <a:rPr lang="ru-RU" dirty="0">
+                    <a:latin typeface="Times New Roman" panose="02020603050405020304" pitchFamily="18" charset="0"/>
+                    <a:cs typeface="Times New Roman" panose="02020603050405020304" pitchFamily="18" charset="0"/>
+                  </a:rPr>
                   <a:t> – температура в °C, </a:t>
                 </a:r>
                 <a14:m>
@@ -5687,7 +5929,10 @@
                   </m:oMath>
                 </a14:m>
                 <a:r>
-                  <a:rPr lang="ru-RU" dirty="0"/>
+                  <a:rPr lang="ru-RU" dirty="0">
+                    <a:latin typeface="Times New Roman" panose="02020603050405020304" pitchFamily="18" charset="0"/>
+                    <a:cs typeface="Times New Roman" panose="02020603050405020304" pitchFamily="18" charset="0"/>
+                  </a:rPr>
                   <a:t> – значение 16-битного регистра, </a:t>
                 </a:r>
                 <a14:m>
@@ -5701,14 +5946,23 @@
                   </m:oMath>
                 </a14:m>
                 <a:r>
-                  <a:rPr lang="ru-RU" dirty="0"/>
+                  <a:rPr lang="ru-RU" dirty="0">
+                    <a:latin typeface="Times New Roman" panose="02020603050405020304" pitchFamily="18" charset="0"/>
+                    <a:cs typeface="Times New Roman" panose="02020603050405020304" pitchFamily="18" charset="0"/>
+                  </a:rPr>
                   <a:t> – максимальное значение для 16-битного регистра.</a:t>
                 </a:r>
-                <a:endParaRPr lang="en-US" dirty="0"/>
+                <a:endParaRPr lang="en-US" dirty="0">
+                  <a:latin typeface="Times New Roman" panose="02020603050405020304" pitchFamily="18" charset="0"/>
+                  <a:cs typeface="Times New Roman" panose="02020603050405020304" pitchFamily="18" charset="0"/>
+                </a:endParaRPr>
               </a:p>
               <a:p>
                 <a:r>
-                  <a:rPr lang="ru-RU" dirty="0"/>
+                  <a:rPr lang="ru-RU" dirty="0">
+                    <a:latin typeface="Times New Roman" panose="02020603050405020304" pitchFamily="18" charset="0"/>
+                    <a:cs typeface="Times New Roman" panose="02020603050405020304" pitchFamily="18" charset="0"/>
+                  </a:rPr>
                   <a:t>Положение бойка:</a:t>
                 </a:r>
               </a:p>
@@ -5782,14 +6036,20 @@
                     </m:oMath>
                   </m:oMathPara>
                 </a14:m>
-                <a:endParaRPr lang="en-US" i="1" dirty="0"/>
+                <a:endParaRPr lang="en-US" i="1" dirty="0">
+                  <a:latin typeface="Times New Roman" panose="02020603050405020304" pitchFamily="18" charset="0"/>
+                  <a:cs typeface="Times New Roman" panose="02020603050405020304" pitchFamily="18" charset="0"/>
+                </a:endParaRPr>
               </a:p>
               <a:p>
                 <a:pPr marL="0" indent="0">
                   <a:buNone/>
                 </a:pPr>
                 <a:r>
-                  <a:rPr lang="ru-RU" dirty="0"/>
+                  <a:rPr lang="ru-RU" dirty="0">
+                    <a:latin typeface="Times New Roman" panose="02020603050405020304" pitchFamily="18" charset="0"/>
+                    <a:cs typeface="Times New Roman" panose="02020603050405020304" pitchFamily="18" charset="0"/>
+                  </a:rPr>
                   <a:t>где </a:t>
                 </a:r>
                 <a14:m>
@@ -5803,7 +6063,10 @@
                   </m:oMath>
                 </a14:m>
                 <a:r>
-                  <a:rPr lang="ru-RU" dirty="0"/>
+                  <a:rPr lang="ru-RU" dirty="0">
+                    <a:latin typeface="Times New Roman" panose="02020603050405020304" pitchFamily="18" charset="0"/>
+                    <a:cs typeface="Times New Roman" panose="02020603050405020304" pitchFamily="18" charset="0"/>
+                  </a:rPr>
                   <a:t> – положение в миллиметрах, </a:t>
                 </a:r>
                 <a14:m>
@@ -5817,14 +6080,17 @@
                   </m:oMath>
                 </a14:m>
                 <a:r>
-                  <a:rPr lang="ru-RU" dirty="0"/>
+                  <a:rPr lang="ru-RU" dirty="0">
+                    <a:latin typeface="Times New Roman" panose="02020603050405020304" pitchFamily="18" charset="0"/>
+                    <a:cs typeface="Times New Roman" panose="02020603050405020304" pitchFamily="18" charset="0"/>
+                  </a:rPr>
                   <a:t> – значение счётчика в импульсах.</a:t>
                 </a:r>
               </a:p>
             </p:txBody>
           </p:sp>
         </mc:Choice>
-        <mc:Fallback xmlns="">
+        <mc:Fallback>
           <p:sp>
             <p:nvSpPr>
               <p:cNvPr id="4" name="Объект 2">
@@ -5850,7 +6116,7 @@
               <a:blipFill>
                 <a:blip r:embed="rId2"/>
                 <a:stretch>
-                  <a:fillRect l="-1506" t="-2358" r="-695"/>
+                  <a:fillRect l="-1506" t="-2476" r="-1043"/>
                 </a:stretch>
               </a:blipFill>
             </p:spPr>
@@ -5921,7 +6187,10 @@
           <a:lstStyle/>
           <a:p>
             <a:r>
-              <a:rPr lang="ru-RU" dirty="0"/>
+              <a:rPr lang="ru-RU" dirty="0">
+                <a:latin typeface="Times New Roman" panose="02020603050405020304" pitchFamily="18" charset="0"/>
+                <a:cs typeface="Times New Roman" panose="02020603050405020304" pitchFamily="18" charset="0"/>
+              </a:rPr>
               <a:t>Основной и управляющий модули</a:t>
             </a:r>
           </a:p>
@@ -5984,7 +6253,7 @@
         <p:spPr>
           <a:xfrm>
             <a:off x="2496000" y="6145623"/>
-            <a:ext cx="7200000" cy="360000"/>
+            <a:ext cx="7200000" cy="276999"/>
           </a:xfrm>
           <a:prstGeom prst="rect">
             <a:avLst/>
@@ -5999,7 +6268,10 @@
           <a:p>
             <a:pPr algn="ctr"/>
             <a:r>
-              <a:rPr lang="ru-RU" sz="1200" dirty="0"/>
+              <a:rPr lang="ru-RU" sz="1200" dirty="0">
+                <a:latin typeface="Times New Roman" panose="02020603050405020304" pitchFamily="18" charset="0"/>
+                <a:cs typeface="Times New Roman" panose="02020603050405020304" pitchFamily="18" charset="0"/>
+              </a:rPr>
               <a:t>Связи программных модулей</a:t>
             </a:r>
           </a:p>
@@ -6057,7 +6329,10 @@
           <a:lstStyle/>
           <a:p>
             <a:r>
-              <a:rPr lang="ru-RU" dirty="0"/>
+              <a:rPr lang="ru-RU" dirty="0">
+                <a:latin typeface="Times New Roman" panose="02020603050405020304" pitchFamily="18" charset="0"/>
+                <a:cs typeface="Times New Roman" panose="02020603050405020304" pitchFamily="18" charset="0"/>
+              </a:rPr>
               <a:t>Экспериментальные данные</a:t>
             </a:r>
           </a:p>
@@ -6214,7 +6489,7 @@
         <p:spPr>
           <a:xfrm>
             <a:off x="263165" y="5058171"/>
-            <a:ext cx="3240000" cy="360000"/>
+            <a:ext cx="3240000" cy="276999"/>
           </a:xfrm>
           <a:prstGeom prst="rect">
             <a:avLst/>
@@ -6229,7 +6504,10 @@
           <a:p>
             <a:pPr algn="ctr"/>
             <a:r>
-              <a:rPr lang="ru-RU" sz="1200" dirty="0"/>
+              <a:rPr lang="ru-RU" sz="1200" dirty="0">
+                <a:latin typeface="Times New Roman" panose="02020603050405020304" pitchFamily="18" charset="0"/>
+                <a:cs typeface="Times New Roman" panose="02020603050405020304" pitchFamily="18" charset="0"/>
+              </a:rPr>
               <a:t>Сообщения от датчиков давления</a:t>
             </a:r>
           </a:p>
@@ -6250,7 +6528,7 @@
         <p:spPr>
           <a:xfrm>
             <a:off x="3677084" y="5048999"/>
-            <a:ext cx="2700000" cy="360000"/>
+            <a:ext cx="2700000" cy="276999"/>
           </a:xfrm>
           <a:prstGeom prst="rect">
             <a:avLst/>
@@ -6265,7 +6543,10 @@
           <a:p>
             <a:pPr algn="ctr"/>
             <a:r>
-              <a:rPr lang="ru-RU" sz="1200" dirty="0"/>
+              <a:rPr lang="ru-RU" sz="1200" dirty="0">
+                <a:latin typeface="Times New Roman" panose="02020603050405020304" pitchFamily="18" charset="0"/>
+                <a:cs typeface="Times New Roman" panose="02020603050405020304" pitchFamily="18" charset="0"/>
+              </a:rPr>
               <a:t>Сообщения от датчиков температуры</a:t>
             </a:r>
           </a:p>
@@ -6286,7 +6567,7 @@
         <p:spPr>
           <a:xfrm>
             <a:off x="6550663" y="5058170"/>
-            <a:ext cx="2519999" cy="360000"/>
+            <a:ext cx="2519999" cy="276999"/>
           </a:xfrm>
           <a:prstGeom prst="rect">
             <a:avLst/>
@@ -6301,7 +6582,10 @@
           <a:p>
             <a:pPr algn="ctr"/>
             <a:r>
-              <a:rPr lang="ru-RU" sz="1200" dirty="0"/>
+              <a:rPr lang="ru-RU" sz="1200" dirty="0">
+                <a:latin typeface="Times New Roman" panose="02020603050405020304" pitchFamily="18" charset="0"/>
+                <a:cs typeface="Times New Roman" panose="02020603050405020304" pitchFamily="18" charset="0"/>
+              </a:rPr>
               <a:t>Сообщения от концевых датчиков</a:t>
             </a:r>
           </a:p>
@@ -6322,7 +6606,7 @@
         <p:spPr>
           <a:xfrm>
             <a:off x="9244241" y="5058169"/>
-            <a:ext cx="2700000" cy="360000"/>
+            <a:ext cx="2700000" cy="276999"/>
           </a:xfrm>
           <a:prstGeom prst="rect">
             <a:avLst/>
@@ -6337,7 +6621,10 @@
           <a:p>
             <a:pPr algn="ctr"/>
             <a:r>
-              <a:rPr lang="ru-RU" sz="1200" dirty="0"/>
+              <a:rPr lang="ru-RU" sz="1200" dirty="0">
+                <a:latin typeface="Times New Roman" panose="02020603050405020304" pitchFamily="18" charset="0"/>
+                <a:cs typeface="Times New Roman" panose="02020603050405020304" pitchFamily="18" charset="0"/>
+              </a:rPr>
               <a:t>Сообщения от считывающей головки</a:t>
             </a:r>
           </a:p>
